--- a/自学/マーケティング基礎/03_どのような価値を提供するのか.pptx
+++ b/自学/マーケティング基礎/03_どのような価値を提供するのか.pptx
@@ -123,6 +123,34 @@
     </a:lvl9pPr>
   </p:defaultTextStyle>
   <p:extLst>
+    <p:ext uri="{521415D9-36F7-43E2-AB2F-B90AF26B5E84}">
+      <p14:sectionLst xmlns:p14="http://schemas.microsoft.com/office/powerpoint/2010/main">
+        <p14:section name="3.1_グローバル・ブランド・ランキング" id="{03B3EEA1-EB63-4F11-89FB-58880CC6FCEB}">
+          <p14:sldIdLst>
+            <p14:sldId id="256"/>
+          </p14:sldIdLst>
+        </p14:section>
+        <p14:section name="3.2_東急ホテルズのブランド戦略" id="{4D88F977-A55B-4B2C-AF60-8ECE96238DDB}">
+          <p14:sldIdLst>
+            <p14:sldId id="257"/>
+            <p14:sldId id="258"/>
+            <p14:sldId id="259"/>
+            <p14:sldId id="260"/>
+            <p14:sldId id="261"/>
+            <p14:sldId id="262"/>
+            <p14:sldId id="263"/>
+            <p14:sldId id="264"/>
+            <p14:sldId id="265"/>
+            <p14:sldId id="266"/>
+            <p14:sldId id="267"/>
+            <p14:sldId id="268"/>
+            <p14:sldId id="269"/>
+            <p14:sldId id="270"/>
+            <p14:sldId id="271"/>
+          </p14:sldIdLst>
+        </p14:section>
+      </p14:sectionLst>
+    </p:ext>
     <p:ext uri="{EFAFB233-063F-42B5-8137-9DF3F51BA10A}">
       <p15:sldGuideLst xmlns:p15="http://schemas.microsoft.com/office/powerpoint/2012/main"/>
     </p:ext>
@@ -212,7 +240,7 @@
           <a:p>
             <a:fld id="{70D25CD4-97A0-4A8B-8B68-79239C598E73}" type="datetimeFigureOut">
               <a:rPr kumimoji="1" lang="ja-JP" altLang="en-US" smtClean="0"/>
-              <a:t>2026/4/13</a:t>
+              <a:t>2026/4/14</a:t>
             </a:fld>
             <a:endParaRPr kumimoji="1" lang="ja-JP" altLang="en-US"/>
           </a:p>
@@ -511,6 +539,124 @@
 </p:notesMaster>
 </file>
 
+<file path=ppt/notesSlides/notesSlide1.xml><?xml version="1.0" encoding="utf-8"?>
+<p:notes xmlns:a="http://schemas.openxmlformats.org/drawingml/2006/main" xmlns:r="http://schemas.openxmlformats.org/officeDocument/2006/relationships" xmlns:p="http://schemas.openxmlformats.org/presentationml/2006/main">
+  <p:cSld>
+    <p:spTree>
+      <p:nvGrpSpPr>
+        <p:cNvPr id="1" name=""/>
+        <p:cNvGrpSpPr/>
+        <p:nvPr/>
+      </p:nvGrpSpPr>
+      <p:grpSpPr>
+        <a:xfrm>
+          <a:off x="0" y="0"/>
+          <a:ext cx="0" cy="0"/>
+          <a:chOff x="0" y="0"/>
+          <a:chExt cx="0" cy="0"/>
+        </a:xfrm>
+      </p:grpSpPr>
+      <p:sp>
+        <p:nvSpPr>
+          <p:cNvPr id="2" name="スライド イメージ プレースホルダー 1"/>
+          <p:cNvSpPr>
+            <a:spLocks noGrp="1" noRot="1" noChangeAspect="1"/>
+          </p:cNvSpPr>
+          <p:nvPr>
+            <p:ph type="sldImg"/>
+          </p:nvPr>
+        </p:nvSpPr>
+        <p:spPr/>
+      </p:sp>
+      <p:sp>
+        <p:nvSpPr>
+          <p:cNvPr id="3" name="ノート プレースホルダー 2"/>
+          <p:cNvSpPr>
+            <a:spLocks noGrp="1"/>
+          </p:cNvSpPr>
+          <p:nvPr>
+            <p:ph type="body" idx="1"/>
+          </p:nvPr>
+        </p:nvSpPr>
+        <p:spPr/>
+        <p:txBody>
+          <a:bodyPr/>
+          <a:lstStyle/>
+          <a:p>
+            <a:r>
+              <a:rPr kumimoji="1" lang="en-US" altLang="ja-JP" dirty="0"/>
+              <a:t>GAFAM</a:t>
+            </a:r>
+            <a:r>
+              <a:rPr kumimoji="1" lang="ja-JP" altLang="en-US" dirty="0"/>
+              <a:t>が上に来そう、一般的かつ企業の認知度が高い</a:t>
+            </a:r>
+            <a:r>
+              <a:rPr kumimoji="1" lang="en-US" altLang="ja-JP" dirty="0"/>
+              <a:t>Microsoft</a:t>
+            </a:r>
+            <a:r>
+              <a:rPr kumimoji="1" lang="ja-JP" altLang="en-US" dirty="0"/>
+              <a:t>がトップ</a:t>
+            </a:r>
+            <a:endParaRPr kumimoji="1" lang="en-US" altLang="ja-JP" dirty="0"/>
+          </a:p>
+          <a:p>
+            <a:r>
+              <a:rPr kumimoji="1" lang="en-US" altLang="ja-JP" dirty="0"/>
+              <a:t>SONY</a:t>
+            </a:r>
+            <a:r>
+              <a:rPr kumimoji="1" lang="ja-JP" altLang="en-US" dirty="0"/>
+              <a:t>、日産、ファーストリテイリングで迷ったが、多角的企業であり、法人・個人の両方に関わっている</a:t>
+            </a:r>
+            <a:r>
+              <a:rPr kumimoji="1" lang="en-US" altLang="ja-JP" dirty="0"/>
+              <a:t>SONY</a:t>
+            </a:r>
+            <a:r>
+              <a:rPr kumimoji="1" lang="ja-JP" altLang="en-US" dirty="0"/>
+              <a:t>を選んだ</a:t>
+            </a:r>
+          </a:p>
+        </p:txBody>
+      </p:sp>
+      <p:sp>
+        <p:nvSpPr>
+          <p:cNvPr id="4" name="スライド番号プレースホルダー 3"/>
+          <p:cNvSpPr>
+            <a:spLocks noGrp="1"/>
+          </p:cNvSpPr>
+          <p:nvPr>
+            <p:ph type="sldNum" sz="quarter" idx="5"/>
+          </p:nvPr>
+        </p:nvSpPr>
+        <p:spPr/>
+        <p:txBody>
+          <a:bodyPr/>
+          <a:lstStyle/>
+          <a:p>
+            <a:fld id="{C7FED925-DE13-4A90-A87A-3369165250F3}" type="slidenum">
+              <a:rPr kumimoji="1" lang="ja-JP" altLang="en-US" smtClean="0"/>
+              <a:t>1</a:t>
+            </a:fld>
+            <a:endParaRPr kumimoji="1" lang="ja-JP" altLang="en-US"/>
+          </a:p>
+        </p:txBody>
+      </p:sp>
+    </p:spTree>
+    <p:extLst>
+      <p:ext uri="{BB962C8B-B14F-4D97-AF65-F5344CB8AC3E}">
+        <p14:creationId xmlns:p14="http://schemas.microsoft.com/office/powerpoint/2010/main" val="3399758996"/>
+      </p:ext>
+    </p:extLst>
+  </p:cSld>
+  <p:clrMapOvr>
+    <a:masterClrMapping/>
+  </p:clrMapOvr>
+</p:notes>
+</file>
+
 <file path=ppt/slideLayouts/slideLayout1.xml><?xml version="1.0" encoding="utf-8"?>
 <p:sldLayout xmlns:a="http://schemas.openxmlformats.org/drawingml/2006/main" xmlns:r="http://schemas.openxmlformats.org/officeDocument/2006/relationships" xmlns:p="http://schemas.openxmlformats.org/presentationml/2006/main" preserve="1" userDrawn="1">
   <p:cSld name="タイトル スライド">
@@ -607,7 +753,7 @@
             <a:fld id="{C01B8CA8-A7CC-40E4-8ED6-81B4D5F9400B}" type="datetimeFigureOut">
               <a:rPr lang="ja-JP" altLang="en-US" smtClean="0"/>
               <a:pPr/>
-              <a:t>2026/4/13</a:t>
+              <a:t>2026/4/14</a:t>
             </a:fld>
             <a:endParaRPr lang="ja-JP" altLang="en-US"/>
           </a:p>
@@ -1033,7 +1179,7 @@
             <a:fld id="{C01B8CA8-A7CC-40E4-8ED6-81B4D5F9400B}" type="datetimeFigureOut">
               <a:rPr lang="ja-JP" altLang="en-US" smtClean="0"/>
               <a:pPr/>
-              <a:t>2026/4/13</a:t>
+              <a:t>2026/4/14</a:t>
             </a:fld>
             <a:endParaRPr lang="ja-JP" altLang="en-US"/>
           </a:p>
@@ -1532,10 +1678,152 @@
         </p:nvSpPr>
         <p:spPr/>
         <p:txBody>
-          <a:bodyPr/>
-          <a:lstStyle/>
-          <a:p>
-            <a:endParaRPr kumimoji="1" lang="ja-JP" altLang="en-US"/>
+          <a:bodyPr>
+            <a:normAutofit lnSpcReduction="10000"/>
+          </a:bodyPr>
+          <a:lstStyle/>
+          <a:p>
+            <a:pPr marL="0" indent="0">
+              <a:buNone/>
+            </a:pPr>
+            <a:r>
+              <a:rPr lang="en-US" altLang="ja-JP" dirty="0"/>
+              <a:t>Q</a:t>
+            </a:r>
+            <a:r>
+              <a:rPr lang="ja-JP" altLang="en-US" dirty="0"/>
+              <a:t>：グローバル・ブランド・ランキングの空欄を埋めよ</a:t>
+            </a:r>
+            <a:endParaRPr lang="en-US" altLang="ja-JP" dirty="0"/>
+          </a:p>
+          <a:p>
+            <a:pPr marL="342900" indent="-342900">
+              <a:buFont typeface="+mj-lt"/>
+              <a:buAutoNum type="arabicPeriod"/>
+            </a:pPr>
+            <a:r>
+              <a:rPr kumimoji="1" lang="en-US" altLang="ja-JP" dirty="0"/>
+              <a:t>Apple</a:t>
+            </a:r>
+          </a:p>
+          <a:p>
+            <a:pPr marL="342900" indent="-342900">
+              <a:buFont typeface="+mj-lt"/>
+              <a:buAutoNum type="arabicPeriod"/>
+            </a:pPr>
+            <a:r>
+              <a:rPr lang="en-US" altLang="ja-JP" dirty="0"/>
+              <a:t>Microsoft</a:t>
+            </a:r>
+          </a:p>
+          <a:p>
+            <a:pPr marL="342900" indent="-342900">
+              <a:buFont typeface="+mj-lt"/>
+              <a:buAutoNum type="arabicPeriod"/>
+            </a:pPr>
+            <a:r>
+              <a:rPr kumimoji="1" lang="en-US" altLang="ja-JP" dirty="0"/>
+              <a:t>Amazon</a:t>
+            </a:r>
+          </a:p>
+          <a:p>
+            <a:pPr marL="342900" indent="-342900">
+              <a:buFont typeface="+mj-lt"/>
+              <a:buAutoNum type="arabicPeriod"/>
+            </a:pPr>
+            <a:r>
+              <a:rPr lang="en-US" altLang="ja-JP" dirty="0"/>
+              <a:t>Google</a:t>
+            </a:r>
+          </a:p>
+          <a:p>
+            <a:pPr marL="342900" indent="-342900">
+              <a:buFont typeface="+mj-lt"/>
+              <a:buAutoNum type="arabicPeriod"/>
+            </a:pPr>
+            <a:r>
+              <a:rPr lang="en-US" altLang="ja-JP" dirty="0"/>
+              <a:t>Samsung</a:t>
+            </a:r>
+          </a:p>
+          <a:p>
+            <a:pPr marL="342900" indent="-342900">
+              <a:buFont typeface="+mj-lt"/>
+              <a:buAutoNum type="arabicPeriod"/>
+            </a:pPr>
+            <a:r>
+              <a:rPr lang="en-US" altLang="ja-JP" dirty="0"/>
+              <a:t>Toyota</a:t>
+            </a:r>
+          </a:p>
+          <a:p>
+            <a:pPr marL="342900" indent="-342900">
+              <a:buFont typeface="+mj-lt"/>
+              <a:buAutoNum type="arabicPeriod"/>
+            </a:pPr>
+            <a:r>
+              <a:rPr lang="en-US" altLang="ja-JP" dirty="0" err="1"/>
+              <a:t>Coca-cola</a:t>
+            </a:r>
+            <a:endParaRPr lang="en-US" altLang="ja-JP" dirty="0"/>
+          </a:p>
+          <a:p>
+            <a:pPr marL="0" indent="0">
+              <a:buNone/>
+            </a:pPr>
+            <a:r>
+              <a:rPr kumimoji="1" lang="ja-JP" altLang="en-US" dirty="0"/>
+              <a:t>　・</a:t>
+            </a:r>
+            <a:endParaRPr lang="en-US" altLang="ja-JP" dirty="0"/>
+          </a:p>
+          <a:p>
+            <a:pPr marL="0" indent="0">
+              <a:buNone/>
+            </a:pPr>
+            <a:r>
+              <a:rPr kumimoji="1" lang="ja-JP" altLang="en-US" dirty="0"/>
+              <a:t>　・</a:t>
+            </a:r>
+            <a:endParaRPr kumimoji="1" lang="en-US" altLang="ja-JP" dirty="0"/>
+          </a:p>
+          <a:p>
+            <a:pPr marL="0" indent="0">
+              <a:buNone/>
+            </a:pPr>
+            <a:r>
+              <a:rPr kumimoji="1" lang="ja-JP" altLang="en-US" dirty="0"/>
+              <a:t>　・</a:t>
+            </a:r>
+            <a:endParaRPr kumimoji="1" lang="en-US" altLang="ja-JP" dirty="0"/>
+          </a:p>
+          <a:p>
+            <a:pPr marL="0" indent="0">
+              <a:buNone/>
+            </a:pPr>
+            <a:r>
+              <a:rPr lang="en-US" altLang="ja-JP" dirty="0"/>
+              <a:t>28. Netflix</a:t>
+            </a:r>
+          </a:p>
+          <a:p>
+            <a:pPr marL="0" indent="0">
+              <a:buNone/>
+            </a:pPr>
+            <a:r>
+              <a:rPr kumimoji="1" lang="en-US" altLang="ja-JP" dirty="0"/>
+              <a:t>29. SONY</a:t>
+            </a:r>
+          </a:p>
+          <a:p>
+            <a:pPr marL="0" indent="0">
+              <a:buNone/>
+            </a:pPr>
+            <a:r>
+              <a:rPr lang="en-US" altLang="ja-JP" dirty="0"/>
+              <a:t>30. Hyundai </a:t>
+            </a:r>
+            <a:endParaRPr kumimoji="1" lang="ja-JP" altLang="en-US" dirty="0"/>
           </a:p>
         </p:txBody>
       </p:sp>
